--- a/library/seminars/sem-09/rendered/sem-09-n68.pptx
+++ b/library/seminars/sem-09/rendered/sem-09-n68.pptx
@@ -502,37 +502,46 @@
           <a:lstStyle/>
           <a:p>
             <a:r>
-              <a:t>Смотрим на устройство без единого имени узла: если завтра собирать это другим инструментом, ни одна строка здесь не изменится.</a:t>
+              <a:t>Смотрим на устройство, которое реально измерено на стенде, без шага, который ему раньше приписывали лишним. Фотография квитанции идёт в модель </a:t>
+            </a:r>
+            <a:r>
+              <a:rPr>
+                <a:latin typeface="Consolas"/>
+              </a:rPr>
+              <a:t>qwen/qwen3-vl-8b-instruct</a:t>
+            </a:r>
+            <a:r>
+              <a:t> целиком, пикселями: отдельного распознавания текста между снимком и моделью в этом устройстве нет и не было. Модель получает только изображение и вопрос прочитать сумму и дату — текста заявки она не видит вовсе.</a:t>
             </a:r>
           </a:p>
           <a:p/>
           <a:p>
             <a:r>
-              <a:t>Фото квитанции и текст заявки приходят в процесс вместе — это обычное содержимое одной и той же формы. Фотография сначала проходит через классическое распознавание, и в дальнейший шаг идёт уже не картинка, а получившийся из неё текст. Рядом с этим текстом лежит ещё одно число — то, которое клиент сам написал в заявке словами или цифрами, когда указывал сумму платежа.</a:t>
+              <a:t>Рядом с прочитанными числами лежит ещё одно: сумма, которую клиент сам написал в заявке словами или цифрами. Эти два значения сравнивает код — одна детерминированная операция, без второго вызова модели и без повторного чтения той же фотографии.</a:t>
             </a:r>
           </a:p>
           <a:p/>
           <a:p>
             <a:r>
-              <a:t>Дальше происходит сравнение этих двух чисел между собой. Не чтение фотографии повторно тем же способом, не переспрос той же модели «ты точно уверена», а сопоставление двух значений, которые в принципе могли оказаться разными, потому что добыты они разными путями.</a:t>
+              <a:t>Если числа совпали, заявка идёт дальше как подтверждённая: у нас есть два независимых друг от друга подтверждения одной суммы. Если не совпали, заявка автоматически не закрывается в пользу ни одного из двух источников — она уходит на ручную сверку, которую сегодня и выполняет Ольга.</a:t>
             </a:r>
           </a:p>
           <a:p/>
           <a:p>
             <a:r>
-              <a:t>Если числа совпали, заявка идёт дальше как подтверждённая: у нас есть две независимых друг от друга подсказки, что сумма именно такая, и они согласны. Если не совпали, дорожка не решает проблему сама — вместо того чтобы молча принять одно из двух значений, она откладывает заявку для отдельной сверки, ровно той, какую сегодня делает человек, когда получает фотографию с неоднозначной цифрой.</a:t>
+              <a:t>Вот чем это устройство отличается от простого «прочитать фотографию и поверить прочитанному». Одно число из одного источника ничем не подтверждено, кроме самого себя. Два числа из двух независимых источников ведут себя иначе: их расхождение само по себе становится сигналом, причём таким, для которого заранее не нужно знать, какое из двух чисел верное, — достаточно знать, что они должны совпадать, и не совпали.</a:t>
             </a:r>
           </a:p>
           <a:p/>
           <a:p>
             <a:r>
-              <a:t>Вот почему это устройство отличается от простого «прочитать фотографию и поверить прочитанному». Одно число из одного источника ничем не подтверждено, кроме самого себя: если оно прочитано неверно, у процесса нет способа заметить ошибку. Два числа из двух независимых источников ведут себя иначе — их расхождение само по себе есть сигнал, причём сигнал, который не требует знать заранее, какое из двух чисел верное. Достаточно знать, что они должны совпадать и не совпали.</a:t>
+              <a:t>Остаётся отдельный вопрос про надёжность одного из двух источников: что, если текст заявки тоже не вполне надёжен? Его пишет тот же человек, что и число на квитанции, — та же уязвимость, что в кейсе про манипуляции с возвратом. Надёжнее источники, которые клиент не контролирует: дата обращения в системе, запись о курсе в CRM, прайс-лист на момент обращения. Такой путь кейс только называет направлением — собранного узла под него на стенде нет.</a:t>
             </a:r>
           </a:p>
           <a:p/>
           <a:p>
             <a:r>
-              <a:t>Чего эта схема не решает — какой инструмент распознаёт фотографию и как именно устроено сравнение на экране. Это дальше, на настоящем стенде.</a:t>
+              <a:t>Дальше — настоящий снимок стенда, на котором это чтение измерялось.</a:t>
             </a:r>
           </a:p>
         </p:txBody>
@@ -3583,7 +3592,7 @@
                 </a:solidFill>
                 <a:latin typeface="Arial"/>
               </a:rPr>
-              <a:t>Фото сверяется с заявкой, не само с собой</a:t>
+              <a:t>Фото читает модель, сверяет код</a:t>
             </a:r>
           </a:p>
         </p:txBody>
@@ -3604,8 +3613,8 @@
         </p:blipFill>
         <p:spPr>
           <a:xfrm>
-            <a:off x="2626187" y="943356"/>
-            <a:ext cx="6936577" cy="2433582"/>
+            <a:off x="1480075" y="943356"/>
+            <a:ext cx="9228801" cy="3237771"/>
           </a:xfrm>
           <a:prstGeom prst="rect">
             <a:avLst/>
@@ -3620,8 +3629,8 @@
         </p:nvSpPr>
         <p:spPr>
           <a:xfrm>
-            <a:off x="502920" y="3541530"/>
-            <a:ext cx="82296" cy="609715"/>
+            <a:off x="502920" y="4345719"/>
+            <a:ext cx="82296" cy="794004"/>
           </a:xfrm>
           <a:prstGeom prst="roundRect">
             <a:avLst>
@@ -3666,8 +3675,8 @@
         </p:nvSpPr>
         <p:spPr>
           <a:xfrm>
-            <a:off x="859536" y="3669546"/>
-            <a:ext cx="10643616" cy="353683"/>
+            <a:off x="859536" y="4473735"/>
+            <a:ext cx="10643616" cy="537972"/>
           </a:xfrm>
           <a:prstGeom prst="rect">
             <a:avLst/>
@@ -3704,7 +3713,25 @@
                 </a:solidFill>
                 <a:latin typeface="Arial"/>
               </a:rPr>
-              <a:t> Фото квитанции и текст заявки приходят вместе → классическое распознавание переводит фото в текст → этот текст (не пиксели) и сумма, которую клиент написал в заявке, идут дальше вместе → сравнение двух чисел → развилка «совпали?».</a:t>
+              <a:t> Фотография квитанции идёт в модель </a:t>
+            </a:r>
+            <a:r>
+              <a:rPr sz="1100" b="1" i="0">
+                <a:solidFill>
+                  <a:srgbClr val="141B2E"/>
+                </a:solidFill>
+                <a:latin typeface="Consolas"/>
+              </a:rPr>
+              <a:t>qwen/qwen3-vl-8b-instruct</a:t>
+            </a:r>
+            <a:r>
+              <a:rPr sz="1100" b="1" i="0">
+                <a:solidFill>
+                  <a:srgbClr val="141B2E"/>
+                </a:solidFill>
+                <a:latin typeface="Arial"/>
+              </a:rPr>
+              <a:t> целиком, пикселями, без распознавания текста → модель возвращает прочитанные сумму и дату → код сравнивает прочитанную сумму с суммой, которую клиент написал в тексте заявки → развилка «совпали?».</a:t>
             </a:r>
           </a:p>
         </p:txBody>
@@ -3717,8 +3744,8 @@
         </p:nvSpPr>
         <p:spPr>
           <a:xfrm>
-            <a:off x="502920" y="4315838"/>
-            <a:ext cx="82296" cy="455422"/>
+            <a:off x="502920" y="5304315"/>
+            <a:ext cx="82296" cy="864870"/>
           </a:xfrm>
           <a:prstGeom prst="roundRect">
             <a:avLst>
@@ -3763,8 +3790,8 @@
         </p:nvSpPr>
         <p:spPr>
           <a:xfrm>
-            <a:off x="859536" y="4443854"/>
-            <a:ext cx="10643616" cy="199389"/>
+            <a:off x="859536" y="5432331"/>
+            <a:ext cx="10643616" cy="608838"/>
           </a:xfrm>
           <a:prstGeom prst="rect">
             <a:avLst/>
@@ -3779,230 +3806,36 @@
           <a:p>
             <a:pPr algn="l">
               <a:lnSpc>
-                <a:spcPts val="1426"/>
+                <a:spcPts val="1550"/>
               </a:lnSpc>
               <a:spcAft>
                 <a:spcPts val="300"/>
               </a:spcAft>
             </a:pPr>
             <a:r>
-              <a:rPr sz="1150" b="1" i="0">
+              <a:rPr sz="1250" b="1" i="0">
                 <a:solidFill>
                   <a:srgbClr val="141B2E"/>
                 </a:solidFill>
                 <a:latin typeface="Arial"/>
               </a:rPr>
-              <a:t>Ветвь «совпали».</a:t>
-            </a:r>
-            <a:r>
-              <a:rPr sz="1150" b="1" i="0">
+              <a:t>Два исхода, и почему сравнение — проверка.</a:t>
+            </a:r>
+            <a:r>
+              <a:rPr sz="1250" b="1" i="0">
                 <a:solidFill>
                   <a:srgbClr val="141B2E"/>
                 </a:solidFill>
                 <a:latin typeface="Arial"/>
               </a:rPr>
-              <a:t> Заявка идёт дальше как подтверждённая: прочитанное с фотографии согласуется с тем, что написал клиент.</a:t>
-            </a:r>
-          </a:p>
-        </p:txBody>
-      </p:sp>
-      <p:sp>
-        <p:nvSpPr>
-          <p:cNvPr id="8" name="Rounded Rectangle 7"/>
-          <p:cNvSpPr/>
-          <p:nvPr/>
-        </p:nvSpPr>
-        <p:spPr>
-          <a:xfrm>
-            <a:off x="502920" y="4935852"/>
-            <a:ext cx="82296" cy="609715"/>
-          </a:xfrm>
-          <a:prstGeom prst="roundRect">
-            <a:avLst>
-              <a:gd name="adj" fmla="val 50000"/>
-            </a:avLst>
-          </a:prstGeom>
-          <a:solidFill>
-            <a:srgbClr val="F0AB00"/>
-          </a:solidFill>
-          <a:ln>
-            <a:noFill/>
-          </a:ln>
-          <a:effectLst/>
-        </p:spPr>
-        <p:style>
-          <a:lnRef idx="1">
-            <a:schemeClr val="accent1"/>
-          </a:lnRef>
-          <a:fillRef idx="3">
-            <a:schemeClr val="accent1"/>
-          </a:fillRef>
-          <a:effectRef idx="2">
-            <a:schemeClr val="accent1"/>
-          </a:effectRef>
-          <a:fontRef idx="minor">
-            <a:schemeClr val="lt1"/>
-          </a:fontRef>
-        </p:style>
-        <p:txBody>
-          <a:bodyPr rtlCol="0" anchor="ctr"/>
-          <a:lstStyle/>
-          <a:p>
-            <a:pPr algn="ctr"/>
-          </a:p>
-        </p:txBody>
-      </p:sp>
-      <p:sp>
-        <p:nvSpPr>
-          <p:cNvPr id="9" name="TextBox 8"/>
-          <p:cNvSpPr txBox="1"/>
-          <p:nvPr/>
-        </p:nvSpPr>
-        <p:spPr>
-          <a:xfrm>
-            <a:off x="859536" y="5063868"/>
-            <a:ext cx="10643616" cy="353683"/>
-          </a:xfrm>
-          <a:prstGeom prst="rect">
-            <a:avLst/>
-          </a:prstGeom>
-          <a:noFill/>
-        </p:spPr>
-        <p:txBody>
-          <a:bodyPr wrap="square" lIns="0" rIns="0" tIns="0" bIns="0" anchor="ctr">
-            <a:spAutoFit/>
-          </a:bodyPr>
-          <a:lstStyle/>
-          <a:p>
-            <a:pPr algn="l">
-              <a:lnSpc>
-                <a:spcPts val="1364"/>
-              </a:lnSpc>
-              <a:spcAft>
-                <a:spcPts val="300"/>
-              </a:spcAft>
-            </a:pPr>
-            <a:r>
-              <a:rPr sz="1100" b="1" i="0">
-                <a:solidFill>
-                  <a:srgbClr val="141B2E"/>
-                </a:solidFill>
-                <a:latin typeface="Arial"/>
-              </a:rPr>
-              <a:t>Ветвь «не совпали».</a:t>
-            </a:r>
-            <a:r>
-              <a:rPr sz="1100" b="1" i="0">
-                <a:solidFill>
-                  <a:srgbClr val="141B2E"/>
-                </a:solidFill>
-                <a:latin typeface="Arial"/>
-              </a:rPr>
-              <a:t> Заявка не закрывается молча в пользу одного из двух чисел. Она уходит Ольге на ручную сверку — тем же способом, каким сегодня это делает человек: кто-то смотрит на обе цифры и решает, что было на самом деле.</a:t>
-            </a:r>
-          </a:p>
-        </p:txBody>
-      </p:sp>
-      <p:sp>
-        <p:nvSpPr>
-          <p:cNvPr id="10" name="Rounded Rectangle 9"/>
-          <p:cNvSpPr/>
-          <p:nvPr/>
-        </p:nvSpPr>
-        <p:spPr>
-          <a:xfrm>
-            <a:off x="502920" y="5710159"/>
-            <a:ext cx="82296" cy="609715"/>
-          </a:xfrm>
-          <a:prstGeom prst="roundRect">
-            <a:avLst>
-              <a:gd name="adj" fmla="val 50000"/>
-            </a:avLst>
-          </a:prstGeom>
-          <a:solidFill>
-            <a:srgbClr val="F0AB00"/>
-          </a:solidFill>
-          <a:ln>
-            <a:noFill/>
-          </a:ln>
-          <a:effectLst/>
-        </p:spPr>
-        <p:style>
-          <a:lnRef idx="1">
-            <a:schemeClr val="accent1"/>
-          </a:lnRef>
-          <a:fillRef idx="3">
-            <a:schemeClr val="accent1"/>
-          </a:fillRef>
-          <a:effectRef idx="2">
-            <a:schemeClr val="accent1"/>
-          </a:effectRef>
-          <a:fontRef idx="minor">
-            <a:schemeClr val="lt1"/>
-          </a:fontRef>
-        </p:style>
-        <p:txBody>
-          <a:bodyPr rtlCol="0" anchor="ctr"/>
-          <a:lstStyle/>
-          <a:p>
-            <a:pPr algn="ctr"/>
-          </a:p>
-        </p:txBody>
-      </p:sp>
-      <p:sp>
-        <p:nvSpPr>
-          <p:cNvPr id="11" name="TextBox 10"/>
-          <p:cNvSpPr txBox="1"/>
-          <p:nvPr/>
-        </p:nvSpPr>
-        <p:spPr>
-          <a:xfrm>
-            <a:off x="859536" y="5838175"/>
-            <a:ext cx="10643616" cy="353683"/>
-          </a:xfrm>
-          <a:prstGeom prst="rect">
-            <a:avLst/>
-          </a:prstGeom>
-          <a:noFill/>
-        </p:spPr>
-        <p:txBody>
-          <a:bodyPr wrap="square" lIns="0" rIns="0" tIns="0" bIns="0" anchor="ctr">
-            <a:spAutoFit/>
-          </a:bodyPr>
-          <a:lstStyle/>
-          <a:p>
-            <a:pPr algn="l">
-              <a:lnSpc>
-                <a:spcPts val="1364"/>
-              </a:lnSpc>
-              <a:spcAft>
-                <a:spcPts val="300"/>
-              </a:spcAft>
-            </a:pPr>
-            <a:r>
-              <a:rPr sz="1100" b="1" i="0">
-                <a:solidFill>
-                  <a:srgbClr val="141B2E"/>
-                </a:solidFill>
-                <a:latin typeface="Arial"/>
-              </a:rPr>
-              <a:t>Что здесь главное.</a:t>
-            </a:r>
-            <a:r>
-              <a:rPr sz="1100" b="1" i="0">
-                <a:solidFill>
-                  <a:srgbClr val="141B2E"/>
-                </a:solidFill>
-                <a:latin typeface="Arial"/>
-              </a:rPr>
-              <a:t> Два сравниваемых числа добыты разными путями: одно с фотографии через распознавание, второе — из текста, который клиент написал сам. Именно поэтому их совпадение или расхождение говорит что-то содержательное.</a:t>
-            </a:r>
-          </a:p>
-        </p:txBody>
-      </p:sp>
-      <p:sp>
-        <p:nvSpPr>
-          <p:cNvPr id="12" name="TextBox 11"/>
+              <a:t> Совпали — заявка идёт дальше обычным порядком. Разошлись — уходит Ольге на ручную сверку. Два сравниваемых числа добыты разными путями: модель читает фотографию и текста заявки не видит; код сравнивает числа и саму фотографию не читает. Эта раздельность путей и делает сравнение проверкой.</a:t>
+            </a:r>
+          </a:p>
+        </p:txBody>
+      </p:sp>
+      <p:sp>
+        <p:nvSpPr>
+          <p:cNvPr id="8" name="TextBox 7"/>
           <p:cNvSpPr txBox="1"/>
           <p:nvPr/>
         </p:nvSpPr>
@@ -4037,7 +3870,7 @@
                 </a:solidFill>
                 <a:latin typeface="Arial"/>
               </a:rPr>
-              <a:t>72</a:t>
+              <a:t>77</a:t>
             </a:r>
           </a:p>
         </p:txBody>
